--- a/topic14-invariants-testing/unit-1/talk-2/b-quickcheck.pptx
+++ b/topic14-invariants-testing/unit-1/talk-2/b-quickcheck.pptx
@@ -1452,7 +1452,7 @@
             <a:fld id="{08B9EBBA-996F-894A-B54A-D6246ED52CEA}" type="datetimeFigureOut">
               <a:rPr lang="en-US" smtClean="0"/>
               <a:pPr/>
-              <a:t>4/13/26</a:t>
+              <a:t>4/20/26</a:t>
             </a:fld>
             <a:endParaRPr lang="en-US" dirty="0"/>
           </a:p>
@@ -1874,7 +1874,7 @@
             <a:fld id="{09B482E8-6E0E-1B4F-B1FD-C69DB9E858D9}" type="datetimeFigureOut">
               <a:rPr lang="en-US" smtClean="0"/>
               <a:pPr/>
-              <a:t>4/13/26</a:t>
+              <a:t>4/20/26</a:t>
             </a:fld>
             <a:endParaRPr lang="en-US" dirty="0"/>
           </a:p>
@@ -2218,7 +2218,7 @@
             <a:fld id="{09B482E8-6E0E-1B4F-B1FD-C69DB9E858D9}" type="datetimeFigureOut">
               <a:rPr lang="en-US" smtClean="0"/>
               <a:pPr/>
-              <a:t>4/13/26</a:t>
+              <a:t>4/20/26</a:t>
             </a:fld>
             <a:endParaRPr lang="en-US" dirty="0"/>
           </a:p>
@@ -2631,7 +2631,7 @@
             <a:fld id="{09B482E8-6E0E-1B4F-B1FD-C69DB9E858D9}" type="datetimeFigureOut">
               <a:rPr lang="en-US" smtClean="0"/>
               <a:pPr/>
-              <a:t>4/13/26</a:t>
+              <a:t>4/20/26</a:t>
             </a:fld>
             <a:endParaRPr lang="en-US" dirty="0"/>
           </a:p>
@@ -3207,7 +3207,7 @@
             <a:fld id="{09B482E8-6E0E-1B4F-B1FD-C69DB9E858D9}" type="datetimeFigureOut">
               <a:rPr lang="en-US" smtClean="0"/>
               <a:pPr/>
-              <a:t>4/13/26</a:t>
+              <a:t>4/20/26</a:t>
             </a:fld>
             <a:endParaRPr lang="en-US" dirty="0"/>
           </a:p>
@@ -3896,7 +3896,7 @@
             <a:fld id="{09B482E8-6E0E-1B4F-B1FD-C69DB9E858D9}" type="datetimeFigureOut">
               <a:rPr lang="en-US" smtClean="0"/>
               <a:pPr/>
-              <a:t>4/13/26</a:t>
+              <a:t>4/20/26</a:t>
             </a:fld>
             <a:endParaRPr lang="en-US" dirty="0"/>
           </a:p>
@@ -4817,7 +4817,7 @@
             <a:fld id="{09B482E8-6E0E-1B4F-B1FD-C69DB9E858D9}" type="datetimeFigureOut">
               <a:rPr lang="en-US" smtClean="0"/>
               <a:pPr/>
-              <a:t>4/13/26</a:t>
+              <a:t>4/20/26</a:t>
             </a:fld>
             <a:endParaRPr lang="en-US" dirty="0"/>
           </a:p>
@@ -5138,7 +5138,7 @@
             <a:fld id="{09B482E8-6E0E-1B4F-B1FD-C69DB9E858D9}" type="datetimeFigureOut">
               <a:rPr lang="en-US" smtClean="0"/>
               <a:pPr/>
-              <a:t>4/13/26</a:t>
+              <a:t>4/20/26</a:t>
             </a:fld>
             <a:endParaRPr lang="en-US" dirty="0"/>
           </a:p>
@@ -5410,7 +5410,7 @@
             <a:fld id="{09B482E8-6E0E-1B4F-B1FD-C69DB9E858D9}" type="datetimeFigureOut">
               <a:rPr lang="en-US" smtClean="0"/>
               <a:pPr/>
-              <a:t>4/13/26</a:t>
+              <a:t>4/20/26</a:t>
             </a:fld>
             <a:endParaRPr lang="en-US" dirty="0"/>
           </a:p>
@@ -5807,7 +5807,7 @@
             <a:fld id="{08B9EBBA-996F-894A-B54A-D6246ED52CEA}" type="datetimeFigureOut">
               <a:rPr lang="en-US" smtClean="0"/>
               <a:pPr/>
-              <a:t>4/13/26</a:t>
+              <a:t>4/20/26</a:t>
             </a:fld>
             <a:endParaRPr lang="en-US" dirty="0"/>
           </a:p>
@@ -6134,7 +6134,7 @@
             <a:fld id="{09B482E8-6E0E-1B4F-B1FD-C69DB9E858D9}" type="datetimeFigureOut">
               <a:rPr lang="en-US" smtClean="0"/>
               <a:pPr/>
-              <a:t>4/13/26</a:t>
+              <a:t>4/20/26</a:t>
             </a:fld>
             <a:endParaRPr lang="en-US" dirty="0"/>
           </a:p>
@@ -6464,7 +6464,7 @@
             <a:fld id="{09B482E8-6E0E-1B4F-B1FD-C69DB9E858D9}" type="datetimeFigureOut">
               <a:rPr lang="en-US" smtClean="0"/>
               <a:pPr/>
-              <a:t>4/13/26</a:t>
+              <a:t>4/20/26</a:t>
             </a:fld>
             <a:endParaRPr lang="en-US" dirty="0"/>
           </a:p>
@@ -6879,7 +6879,7 @@
             <a:fld id="{8DFA1846-DA80-1C48-A609-854EA85C59AD}" type="datetimeFigureOut">
               <a:rPr lang="en-US" smtClean="0"/>
               <a:pPr/>
-              <a:t>4/13/26</a:t>
+              <a:t>4/20/26</a:t>
             </a:fld>
             <a:endParaRPr lang="en-US" dirty="0"/>
           </a:p>
@@ -7286,7 +7286,7 @@
             <a:fld id="{09B482E8-6E0E-1B4F-B1FD-C69DB9E858D9}" type="datetimeFigureOut">
               <a:rPr lang="en-US" smtClean="0"/>
               <a:pPr/>
-              <a:t>4/13/26</a:t>
+              <a:t>4/20/26</a:t>
             </a:fld>
             <a:endParaRPr lang="en-US" dirty="0"/>
           </a:p>
@@ -7813,7 +7813,7 @@
             <a:fld id="{09B482E8-6E0E-1B4F-B1FD-C69DB9E858D9}" type="datetimeFigureOut">
               <a:rPr lang="en-US" smtClean="0"/>
               <a:pPr/>
-              <a:t>4/13/26</a:t>
+              <a:t>4/20/26</a:t>
             </a:fld>
             <a:endParaRPr lang="en-US" dirty="0"/>
           </a:p>
@@ -8091,7 +8091,7 @@
             <a:fld id="{F13A34C8-038E-2045-AF43-DF7DBB8E0E9E}" type="datetimeFigureOut">
               <a:rPr lang="en-US" smtClean="0"/>
               <a:pPr/>
-              <a:t>4/13/26</a:t>
+              <a:t>4/20/26</a:t>
             </a:fld>
             <a:endParaRPr lang="en-US" dirty="0"/>
           </a:p>
@@ -8268,7 +8268,7 @@
             <a:fld id="{8818C68F-D26B-8F47-958C-23B49CF8A634}" type="datetimeFigureOut">
               <a:rPr lang="en-US" smtClean="0"/>
               <a:pPr/>
-              <a:t>4/13/26</a:t>
+              <a:t>4/20/26</a:t>
             </a:fld>
             <a:endParaRPr lang="en-US" dirty="0"/>
           </a:p>
@@ -8679,7 +8679,7 @@
             <a:fld id="{09B482E8-6E0E-1B4F-B1FD-C69DB9E858D9}" type="datetimeFigureOut">
               <a:rPr lang="en-US" smtClean="0"/>
               <a:pPr/>
-              <a:t>4/13/26</a:t>
+              <a:t>4/20/26</a:t>
             </a:fld>
             <a:endParaRPr lang="en-US" dirty="0"/>
           </a:p>
@@ -9109,7 +9109,7 @@
             <a:fld id="{09B482E8-6E0E-1B4F-B1FD-C69DB9E858D9}" type="datetimeFigureOut">
               <a:rPr lang="en-US" smtClean="0"/>
               <a:pPr/>
-              <a:t>4/13/26</a:t>
+              <a:t>4/20/26</a:t>
             </a:fld>
             <a:endParaRPr lang="en-US" dirty="0"/>
           </a:p>
@@ -9539,7 +9539,7 @@
             <a:fld id="{09B482E8-6E0E-1B4F-B1FD-C69DB9E858D9}" type="datetimeFigureOut">
               <a:rPr lang="en-US" smtClean="0"/>
               <a:pPr/>
-              <a:t>4/13/26</a:t>
+              <a:t>4/20/26</a:t>
             </a:fld>
             <a:endParaRPr lang="en-US" dirty="0"/>
           </a:p>
@@ -9896,7 +9896,7 @@
             <a:fld id="{09B482E8-6E0E-1B4F-B1FD-C69DB9E858D9}" type="datetimeFigureOut">
               <a:rPr lang="en-US" smtClean="0"/>
               <a:pPr/>
-              <a:t>4/13/26</a:t>
+              <a:t>4/20/26</a:t>
             </a:fld>
             <a:endParaRPr lang="en-US" dirty="0"/>
           </a:p>
@@ -10298,7 +10298,7 @@
             <a:fld id="{8DFA1846-DA80-1C48-A609-854EA85C59AD}" type="datetimeFigureOut">
               <a:rPr lang="en-US" smtClean="0"/>
               <a:pPr/>
-              <a:t>4/13/26</a:t>
+              <a:t>4/20/26</a:t>
             </a:fld>
             <a:endParaRPr lang="en-US" dirty="0"/>
           </a:p>
@@ -10724,7 +10724,7 @@
             <a:fld id="{09B482E8-6E0E-1B4F-B1FD-C69DB9E858D9}" type="datetimeFigureOut">
               <a:rPr lang="en-US" smtClean="0"/>
               <a:pPr/>
-              <a:t>4/13/26</a:t>
+              <a:t>4/20/26</a:t>
             </a:fld>
             <a:endParaRPr lang="en-US" dirty="0"/>
           </a:p>
@@ -11313,7 +11313,7 @@
             <a:fld id="{09B482E8-6E0E-1B4F-B1FD-C69DB9E858D9}" type="datetimeFigureOut">
               <a:rPr lang="en-US" smtClean="0"/>
               <a:pPr/>
-              <a:t>4/13/26</a:t>
+              <a:t>4/20/26</a:t>
             </a:fld>
             <a:endParaRPr lang="en-US" dirty="0"/>
           </a:p>
@@ -12015,7 +12015,7 @@
             <a:fld id="{09B482E8-6E0E-1B4F-B1FD-C69DB9E858D9}" type="datetimeFigureOut">
               <a:rPr lang="en-US" smtClean="0"/>
               <a:pPr/>
-              <a:t>4/13/26</a:t>
+              <a:t>4/20/26</a:t>
             </a:fld>
             <a:endParaRPr lang="en-US" dirty="0"/>
           </a:p>
@@ -12949,7 +12949,7 @@
             <a:fld id="{09B482E8-6E0E-1B4F-B1FD-C69DB9E858D9}" type="datetimeFigureOut">
               <a:rPr lang="en-US" smtClean="0"/>
               <a:pPr/>
-              <a:t>4/13/26</a:t>
+              <a:t>4/20/26</a:t>
             </a:fld>
             <a:endParaRPr lang="en-US" dirty="0"/>
           </a:p>
@@ -13288,7 +13288,7 @@
             <a:fld id="{09B482E8-6E0E-1B4F-B1FD-C69DB9E858D9}" type="datetimeFigureOut">
               <a:rPr lang="en-US" smtClean="0"/>
               <a:pPr/>
-              <a:t>4/13/26</a:t>
+              <a:t>4/20/26</a:t>
             </a:fld>
             <a:endParaRPr lang="en-US" dirty="0"/>
           </a:p>
@@ -13575,7 +13575,7 @@
             <a:fld id="{09B482E8-6E0E-1B4F-B1FD-C69DB9E858D9}" type="datetimeFigureOut">
               <a:rPr lang="en-US" smtClean="0"/>
               <a:pPr/>
-              <a:t>4/13/26</a:t>
+              <a:t>4/20/26</a:t>
             </a:fld>
             <a:endParaRPr lang="en-US" dirty="0"/>
           </a:p>
@@ -14003,7 +14003,7 @@
             <a:fld id="{09B482E8-6E0E-1B4F-B1FD-C69DB9E858D9}" type="datetimeFigureOut">
               <a:rPr lang="en-US" smtClean="0"/>
               <a:pPr/>
-              <a:t>4/13/26</a:t>
+              <a:t>4/20/26</a:t>
             </a:fld>
             <a:endParaRPr lang="en-US" dirty="0"/>
           </a:p>
@@ -14517,7 +14517,7 @@
             <a:fld id="{09B482E8-6E0E-1B4F-B1FD-C69DB9E858D9}" type="datetimeFigureOut">
               <a:rPr lang="en-US" smtClean="0"/>
               <a:pPr/>
-              <a:t>4/13/26</a:t>
+              <a:t>4/20/26</a:t>
             </a:fld>
             <a:endParaRPr lang="en-US" dirty="0"/>
           </a:p>
@@ -14782,7 +14782,7 @@
             <a:fld id="{F13A34C8-038E-2045-AF43-DF7DBB8E0E9E}" type="datetimeFigureOut">
               <a:rPr lang="en-US" smtClean="0"/>
               <a:pPr/>
-              <a:t>4/13/26</a:t>
+              <a:t>4/20/26</a:t>
             </a:fld>
             <a:endParaRPr lang="en-US" dirty="0"/>
           </a:p>
@@ -14960,7 +14960,7 @@
             <a:fld id="{8818C68F-D26B-8F47-958C-23B49CF8A634}" type="datetimeFigureOut">
               <a:rPr lang="en-US" smtClean="0"/>
               <a:pPr/>
-              <a:t>4/13/26</a:t>
+              <a:t>4/20/26</a:t>
             </a:fld>
             <a:endParaRPr lang="en-US" dirty="0"/>
           </a:p>
@@ -15358,7 +15358,7 @@
             <a:fld id="{09B482E8-6E0E-1B4F-B1FD-C69DB9E858D9}" type="datetimeFigureOut">
               <a:rPr lang="en-US" smtClean="0"/>
               <a:pPr/>
-              <a:t>4/13/26</a:t>
+              <a:t>4/20/26</a:t>
             </a:fld>
             <a:endParaRPr lang="en-US" dirty="0"/>
           </a:p>
@@ -15775,7 +15775,7 @@
             <a:fld id="{09B482E8-6E0E-1B4F-B1FD-C69DB9E858D9}" type="datetimeFigureOut">
               <a:rPr lang="en-US" smtClean="0"/>
               <a:pPr/>
-              <a:t>4/13/26</a:t>
+              <a:t>4/20/26</a:t>
             </a:fld>
             <a:endParaRPr lang="en-US" dirty="0"/>
           </a:p>
@@ -16027,7 +16027,7 @@
             <a:fld id="{09B482E8-6E0E-1B4F-B1FD-C69DB9E858D9}" type="datetimeFigureOut">
               <a:rPr lang="en-US" smtClean="0"/>
               <a:pPr/>
-              <a:t>4/13/26</a:t>
+              <a:t>4/20/26</a:t>
             </a:fld>
             <a:endParaRPr lang="en-US" dirty="0"/>
           </a:p>
@@ -16488,7 +16488,7 @@
           </a:prstGeom>
           <a:extLst>
             <a:ext uri="{909E8E84-426E-40dd-AFC4-6F175D3DCCD1}">
-              <a14:hiddenFill xmlns:a14="http://schemas.microsoft.com/office/drawing/2010/main" xmlns="">
+              <a14:hiddenFill xmlns="" xmlns:a14="http://schemas.microsoft.com/office/drawing/2010/main">
                 <a:solidFill>
                   <a:srgbClr val="FFFFFF"/>
                 </a:solidFill>
@@ -16628,7 +16628,7 @@
             <a:fld id="{09B482E8-6E0E-1B4F-B1FD-C69DB9E858D9}" type="datetimeFigureOut">
               <a:rPr lang="en-US" smtClean="0"/>
               <a:pPr/>
-              <a:t>4/13/26</a:t>
+              <a:t>4/20/26</a:t>
             </a:fld>
             <a:endParaRPr lang="en-US" dirty="0"/>
           </a:p>
@@ -17067,14 +17067,14 @@
           <a:ln/>
           <a:extLst>
             <a:ext uri="{909E8E84-426E-40dd-AFC4-6F175D3DCCD1}">
-              <a14:hiddenFill xmlns:a14="http://schemas.microsoft.com/office/drawing/2010/main" xmlns="">
+              <a14:hiddenFill xmlns="" xmlns:a14="http://schemas.microsoft.com/office/drawing/2010/main">
                 <a:solidFill>
                   <a:srgbClr val="FFFFFF"/>
                 </a:solidFill>
               </a14:hiddenFill>
             </a:ext>
             <a:ext uri="{91240B29-F687-4f45-9708-019B960494DF}">
-              <a14:hiddenLine xmlns:a14="http://schemas.microsoft.com/office/drawing/2010/main" xmlns="" w="9525">
+              <a14:hiddenLine xmlns="" xmlns:a14="http://schemas.microsoft.com/office/drawing/2010/main" w="9525">
                 <a:solidFill>
                   <a:srgbClr val="000000"/>
                 </a:solidFill>
@@ -17227,14 +17227,14 @@
           </a:ln>
           <a:extLst>
             <a:ext uri="{909E8E84-426E-40dd-AFC4-6F175D3DCCD1}">
-              <a14:hiddenFill xmlns:a14="http://schemas.microsoft.com/office/drawing/2010/main" xmlns="">
+              <a14:hiddenFill xmlns="" xmlns:a14="http://schemas.microsoft.com/office/drawing/2010/main">
                 <a:solidFill>
                   <a:srgbClr val="FFFFFF"/>
                 </a:solidFill>
               </a14:hiddenFill>
             </a:ext>
             <a:ext uri="{91240B29-F687-4f45-9708-019B960494DF}">
-              <a14:hiddenLine xmlns:a14="http://schemas.microsoft.com/office/drawing/2010/main" xmlns="" w="9525">
+              <a14:hiddenLine xmlns="" xmlns:a14="http://schemas.microsoft.com/office/drawing/2010/main" w="9525">
                 <a:solidFill>
                   <a:srgbClr val="000000"/>
                 </a:solidFill>
@@ -17393,14 +17393,14 @@
           </a:ln>
           <a:extLst>
             <a:ext uri="{909E8E84-426E-40dd-AFC4-6F175D3DCCD1}">
-              <a14:hiddenFill xmlns:a14="http://schemas.microsoft.com/office/drawing/2010/main" xmlns="">
+              <a14:hiddenFill xmlns="" xmlns:a14="http://schemas.microsoft.com/office/drawing/2010/main">
                 <a:solidFill>
                   <a:srgbClr val="FFFFFF"/>
                 </a:solidFill>
               </a14:hiddenFill>
             </a:ext>
             <a:ext uri="{91240B29-F687-4f45-9708-019B960494DF}">
-              <a14:hiddenLine xmlns:a14="http://schemas.microsoft.com/office/drawing/2010/main" xmlns="" w="9525">
+              <a14:hiddenLine xmlns="" xmlns:a14="http://schemas.microsoft.com/office/drawing/2010/main" w="9525">
                 <a:solidFill>
                   <a:srgbClr val="000000"/>
                 </a:solidFill>
@@ -17469,14 +17469,14 @@
           </a:ln>
           <a:extLst>
             <a:ext uri="{909E8E84-426E-40dd-AFC4-6F175D3DCCD1}">
-              <a14:hiddenFill xmlns:a14="http://schemas.microsoft.com/office/drawing/2010/main" xmlns="">
+              <a14:hiddenFill xmlns="" xmlns:a14="http://schemas.microsoft.com/office/drawing/2010/main">
                 <a:solidFill>
                   <a:srgbClr val="FFFFFF"/>
                 </a:solidFill>
               </a14:hiddenFill>
             </a:ext>
             <a:ext uri="{91240B29-F687-4f45-9708-019B960494DF}">
-              <a14:hiddenLine xmlns:a14="http://schemas.microsoft.com/office/drawing/2010/main" xmlns="" w="9525">
+              <a14:hiddenLine xmlns="" xmlns:a14="http://schemas.microsoft.com/office/drawing/2010/main" w="9525">
                 <a:solidFill>
                   <a:srgbClr val="000000"/>
                 </a:solidFill>
@@ -18100,14 +18100,14 @@
           <a:ln/>
           <a:extLst>
             <a:ext uri="{909E8E84-426E-40dd-AFC4-6F175D3DCCD1}">
-              <a14:hiddenFill xmlns:a14="http://schemas.microsoft.com/office/drawing/2010/main" xmlns="">
+              <a14:hiddenFill xmlns="" xmlns:a14="http://schemas.microsoft.com/office/drawing/2010/main">
                 <a:solidFill>
                   <a:srgbClr val="FFFFFF"/>
                 </a:solidFill>
               </a14:hiddenFill>
             </a:ext>
             <a:ext uri="{91240B29-F687-4f45-9708-019B960494DF}">
-              <a14:hiddenLine xmlns:a14="http://schemas.microsoft.com/office/drawing/2010/main" xmlns="" w="9525">
+              <a14:hiddenLine xmlns="" xmlns:a14="http://schemas.microsoft.com/office/drawing/2010/main" w="9525">
                 <a:solidFill>
                   <a:srgbClr val="000000"/>
                 </a:solidFill>
@@ -19752,14 +19752,14 @@
           <a:ln/>
           <a:extLst>
             <a:ext uri="{909E8E84-426E-40dd-AFC4-6F175D3DCCD1}">
-              <a14:hiddenFill xmlns:a14="http://schemas.microsoft.com/office/drawing/2010/main" xmlns="">
+              <a14:hiddenFill xmlns="" xmlns:a14="http://schemas.microsoft.com/office/drawing/2010/main">
                 <a:solidFill>
                   <a:srgbClr val="FFFFFF"/>
                 </a:solidFill>
               </a14:hiddenFill>
             </a:ext>
             <a:ext uri="{91240B29-F687-4f45-9708-019B960494DF}">
-              <a14:hiddenLine xmlns:a14="http://schemas.microsoft.com/office/drawing/2010/main" xmlns="" w="9525">
+              <a14:hiddenLine xmlns="" xmlns:a14="http://schemas.microsoft.com/office/drawing/2010/main" w="9525">
                 <a:solidFill>
                   <a:srgbClr val="000000"/>
                 </a:solidFill>
@@ -21222,14 +21222,14 @@
           <a:ln/>
           <a:extLst>
             <a:ext uri="{909E8E84-426E-40dd-AFC4-6F175D3DCCD1}">
-              <a14:hiddenFill xmlns:a14="http://schemas.microsoft.com/office/drawing/2010/main" xmlns="">
+              <a14:hiddenFill xmlns="" xmlns:a14="http://schemas.microsoft.com/office/drawing/2010/main">
                 <a:solidFill>
                   <a:srgbClr val="FFFFFF"/>
                 </a:solidFill>
               </a14:hiddenFill>
             </a:ext>
             <a:ext uri="{91240B29-F687-4f45-9708-019B960494DF}">
-              <a14:hiddenLine xmlns:a14="http://schemas.microsoft.com/office/drawing/2010/main" xmlns="" w="9525">
+              <a14:hiddenLine xmlns="" xmlns:a14="http://schemas.microsoft.com/office/drawing/2010/main" w="9525">
                 <a:solidFill>
                   <a:srgbClr val="000000"/>
                 </a:solidFill>
@@ -22274,14 +22274,14 @@
         <p:spPr>
           <a:extLst>
             <a:ext uri="{909E8E84-426E-40dd-AFC4-6F175D3DCCD1}">
-              <a14:hiddenFill xmlns:a14="http://schemas.microsoft.com/office/drawing/2010/main" xmlns="">
+              <a14:hiddenFill xmlns="" xmlns:a14="http://schemas.microsoft.com/office/drawing/2010/main">
                 <a:solidFill>
                   <a:srgbClr val="FFFFFF"/>
                 </a:solidFill>
               </a14:hiddenFill>
             </a:ext>
             <a:ext uri="{91240B29-F687-4f45-9708-019B960494DF}">
-              <a14:hiddenLine xmlns:a14="http://schemas.microsoft.com/office/drawing/2010/main" xmlns="" w="9525">
+              <a14:hiddenLine xmlns="" xmlns:a14="http://schemas.microsoft.com/office/drawing/2010/main" w="9525">
                 <a:solidFill>
                   <a:srgbClr val="000000"/>
                 </a:solidFill>
@@ -22889,14 +22889,14 @@
           <a:ln/>
           <a:extLst>
             <a:ext uri="{909E8E84-426E-40dd-AFC4-6F175D3DCCD1}">
-              <a14:hiddenFill xmlns:a14="http://schemas.microsoft.com/office/drawing/2010/main" xmlns="">
+              <a14:hiddenFill xmlns="" xmlns:a14="http://schemas.microsoft.com/office/drawing/2010/main">
                 <a:solidFill>
                   <a:srgbClr val="FFFFFF"/>
                 </a:solidFill>
               </a14:hiddenFill>
             </a:ext>
             <a:ext uri="{91240B29-F687-4f45-9708-019B960494DF}">
-              <a14:hiddenLine xmlns:a14="http://schemas.microsoft.com/office/drawing/2010/main" xmlns="" w="9525">
+              <a14:hiddenLine xmlns="" xmlns:a14="http://schemas.microsoft.com/office/drawing/2010/main" w="9525">
                 <a:solidFill>
                   <a:srgbClr val="000000"/>
                 </a:solidFill>
@@ -24731,14 +24731,14 @@
           <a:ln/>
           <a:extLst>
             <a:ext uri="{909E8E84-426E-40dd-AFC4-6F175D3DCCD1}">
-              <a14:hiddenFill xmlns:a14="http://schemas.microsoft.com/office/drawing/2010/main" xmlns="">
+              <a14:hiddenFill xmlns="" xmlns:a14="http://schemas.microsoft.com/office/drawing/2010/main">
                 <a:solidFill>
                   <a:srgbClr val="FFFFFF"/>
                 </a:solidFill>
               </a14:hiddenFill>
             </a:ext>
             <a:ext uri="{91240B29-F687-4f45-9708-019B960494DF}">
-              <a14:hiddenLine xmlns:a14="http://schemas.microsoft.com/office/drawing/2010/main" xmlns="" w="9525">
+              <a14:hiddenLine xmlns="" xmlns:a14="http://schemas.microsoft.com/office/drawing/2010/main" w="9525">
                 <a:solidFill>
                   <a:srgbClr val="000000"/>
                 </a:solidFill>
@@ -26557,14 +26557,14 @@
           <a:ln/>
           <a:extLst>
             <a:ext uri="{909E8E84-426E-40dd-AFC4-6F175D3DCCD1}">
-              <a14:hiddenFill xmlns:a14="http://schemas.microsoft.com/office/drawing/2010/main" xmlns="">
+              <a14:hiddenFill xmlns="" xmlns:a14="http://schemas.microsoft.com/office/drawing/2010/main">
                 <a:solidFill>
                   <a:srgbClr val="FFFFFF"/>
                 </a:solidFill>
               </a14:hiddenFill>
             </a:ext>
             <a:ext uri="{91240B29-F687-4f45-9708-019B960494DF}">
-              <a14:hiddenLine xmlns:a14="http://schemas.microsoft.com/office/drawing/2010/main" xmlns="" w="9525">
+              <a14:hiddenLine xmlns="" xmlns:a14="http://schemas.microsoft.com/office/drawing/2010/main" w="9525">
                 <a:solidFill>
                   <a:srgbClr val="000000"/>
                 </a:solidFill>
@@ -27744,7 +27744,7 @@
         <p:spPr>
           <a:xfrm>
             <a:off x="457200" y="3669761"/>
-            <a:ext cx="2651760" cy="845679"/>
+            <a:ext cx="2651760" cy="1002978"/>
           </a:xfrm>
           <a:prstGeom prst="rect">
             <a:avLst/>
@@ -27927,7 +27927,7 @@
         <p:spPr>
           <a:xfrm>
             <a:off x="3337560" y="3669761"/>
-            <a:ext cx="2651760" cy="777240"/>
+            <a:ext cx="2651760" cy="922082"/>
           </a:xfrm>
           <a:prstGeom prst="rect">
             <a:avLst/>
@@ -28110,7 +28110,7 @@
         <p:spPr>
           <a:xfrm>
             <a:off x="6217920" y="3669761"/>
-            <a:ext cx="2651760" cy="777240"/>
+            <a:ext cx="2651760" cy="922082"/>
           </a:xfrm>
           <a:prstGeom prst="rect">
             <a:avLst/>
@@ -28231,14 +28231,14 @@
           <a:ln/>
           <a:extLst>
             <a:ext uri="{909E8E84-426E-40dd-AFC4-6F175D3DCCD1}">
-              <a14:hiddenFill xmlns:a14="http://schemas.microsoft.com/office/drawing/2010/main" xmlns="">
+              <a14:hiddenFill xmlns="" xmlns:a14="http://schemas.microsoft.com/office/drawing/2010/main">
                 <a:solidFill>
                   <a:srgbClr val="FFFFFF"/>
                 </a:solidFill>
               </a14:hiddenFill>
             </a:ext>
             <a:ext uri="{91240B29-F687-4f45-9708-019B960494DF}">
-              <a14:hiddenLine xmlns:a14="http://schemas.microsoft.com/office/drawing/2010/main" xmlns="" w="9525">
+              <a14:hiddenLine xmlns="" xmlns:a14="http://schemas.microsoft.com/office/drawing/2010/main" w="9525">
                 <a:solidFill>
                   <a:srgbClr val="000000"/>
                 </a:solidFill>
@@ -30212,14 +30212,14 @@
           <a:ln/>
           <a:extLst>
             <a:ext uri="{909E8E84-426E-40dd-AFC4-6F175D3DCCD1}">
-              <a14:hiddenFill xmlns:a14="http://schemas.microsoft.com/office/drawing/2010/main" xmlns="">
+              <a14:hiddenFill xmlns="" xmlns:a14="http://schemas.microsoft.com/office/drawing/2010/main">
                 <a:solidFill>
                   <a:srgbClr val="FFFFFF"/>
                 </a:solidFill>
               </a14:hiddenFill>
             </a:ext>
             <a:ext uri="{91240B29-F687-4f45-9708-019B960494DF}">
-              <a14:hiddenLine xmlns:a14="http://schemas.microsoft.com/office/drawing/2010/main" xmlns="" w="9525">
+              <a14:hiddenLine xmlns="" xmlns:a14="http://schemas.microsoft.com/office/drawing/2010/main" w="9525">
                 <a:solidFill>
                   <a:srgbClr val="000000"/>
                 </a:solidFill>
@@ -31897,14 +31897,14 @@
           <a:ln/>
           <a:extLst>
             <a:ext uri="{909E8E84-426E-40dd-AFC4-6F175D3DCCD1}">
-              <a14:hiddenFill xmlns:a14="http://schemas.microsoft.com/office/drawing/2010/main" xmlns="">
+              <a14:hiddenFill xmlns="" xmlns:a14="http://schemas.microsoft.com/office/drawing/2010/main">
                 <a:solidFill>
                   <a:srgbClr val="FFFFFF"/>
                 </a:solidFill>
               </a14:hiddenFill>
             </a:ext>
             <a:ext uri="{91240B29-F687-4f45-9708-019B960494DF}">
-              <a14:hiddenLine xmlns:a14="http://schemas.microsoft.com/office/drawing/2010/main" xmlns="" w="9525">
+              <a14:hiddenLine xmlns="" xmlns:a14="http://schemas.microsoft.com/office/drawing/2010/main" w="9525">
                 <a:solidFill>
                   <a:srgbClr val="000000"/>
                 </a:solidFill>
@@ -33196,7 +33196,7 @@
         <p:spPr>
           <a:xfrm>
             <a:off x="381786" y="2430135"/>
-            <a:ext cx="2651760" cy="777240"/>
+            <a:ext cx="2651760" cy="905256"/>
           </a:xfrm>
           <a:prstGeom prst="rect">
             <a:avLst/>
@@ -33683,14 +33683,14 @@
           <a:ln/>
           <a:extLst>
             <a:ext uri="{909E8E84-426E-40dd-AFC4-6F175D3DCCD1}">
-              <a14:hiddenFill xmlns:a14="http://schemas.microsoft.com/office/drawing/2010/main" xmlns="">
+              <a14:hiddenFill xmlns="" xmlns:a14="http://schemas.microsoft.com/office/drawing/2010/main">
                 <a:solidFill>
                   <a:srgbClr val="FFFFFF"/>
                 </a:solidFill>
               </a14:hiddenFill>
             </a:ext>
             <a:ext uri="{91240B29-F687-4f45-9708-019B960494DF}">
-              <a14:hiddenLine xmlns:a14="http://schemas.microsoft.com/office/drawing/2010/main" xmlns="" w="9525">
+              <a14:hiddenLine xmlns="" xmlns:a14="http://schemas.microsoft.com/office/drawing/2010/main" w="9525">
                 <a:solidFill>
                   <a:srgbClr val="000000"/>
                 </a:solidFill>
@@ -35341,7 +35341,7 @@
         <p:spPr>
           <a:xfrm>
             <a:off x="457200" y="3912030"/>
-            <a:ext cx="8229600" cy="960120"/>
+            <a:ext cx="8229600" cy="1097280"/>
           </a:xfrm>
           <a:prstGeom prst="rect">
             <a:avLst/>
@@ -35496,14 +35496,14 @@
           <a:ln/>
           <a:extLst>
             <a:ext uri="{909E8E84-426E-40dd-AFC4-6F175D3DCCD1}">
-              <a14:hiddenFill xmlns:a14="http://schemas.microsoft.com/office/drawing/2010/main" xmlns="">
+              <a14:hiddenFill xmlns="" xmlns:a14="http://schemas.microsoft.com/office/drawing/2010/main">
                 <a:solidFill>
                   <a:srgbClr val="FFFFFF"/>
                 </a:solidFill>
               </a14:hiddenFill>
             </a:ext>
             <a:ext uri="{91240B29-F687-4f45-9708-019B960494DF}">
-              <a14:hiddenLine xmlns:a14="http://schemas.microsoft.com/office/drawing/2010/main" xmlns="" w="9525">
+              <a14:hiddenLine xmlns="" xmlns:a14="http://schemas.microsoft.com/office/drawing/2010/main" w="9525">
                 <a:solidFill>
                   <a:srgbClr val="000000"/>
                 </a:solidFill>
